--- a/docs/路演PPT_V2.pptx
+++ b/docs/路演PPT_V2.pptx
@@ -27170,7 +27170,7 @@
               </a:defRPr>
             </a:pPr>
             <a:r>
-              <a:t>12个月收入+39城复制，第8个月盈亏平衡</a:t>
+              <a:t>12个月收入+39城复制，首月即实现正向现金流（营收以《财务预测与商业计划》697万为准，下表为早期保守季度测算）</a:t>
             </a:r>
           </a:p>
         </p:txBody>
@@ -33834,7 +33834,7 @@
               </a:defRPr>
             </a:pPr>
             <a:r>
-              <a:t>盈亏平衡，付费用户500+</a:t>
+              <a:t>扩大盈利规模，付费用户500+</a:t>
             </a:r>
           </a:p>
         </p:txBody>

--- a/docs/路演PPT_V2.pptx
+++ b/docs/路演PPT_V2.pptx
@@ -27170,7 +27170,7 @@
               </a:defRPr>
             </a:pPr>
             <a:r>
-              <a:t>12个月收入+39城复制，首月即实现正向现金流（营收以《财务预测与商业计划》697万为准，下表为早期保守季度测算）</a:t>
+              <a:t>12个月收入+39城复制，首月即实现正向现金流（已对齐《财务预测与商业计划》权威模型，M12累计营收697.1万）</a:t>
             </a:r>
           </a:p>
         </p:txBody>
@@ -27933,7 +27933,7 @@
               </a:defRPr>
             </a:pPr>
             <a:r>
-              <a:t>50</a:t>
+              <a:t>150</a:t>
             </a:r>
           </a:p>
         </p:txBody>
@@ -28023,7 +28023,7 @@
               </a:defRPr>
             </a:pPr>
             <a:r>
-              <a:t>3.0</a:t>
+              <a:t>10.9</a:t>
             </a:r>
           </a:p>
         </p:txBody>
@@ -28113,7 +28113,7 @@
               </a:defRPr>
             </a:pPr>
             <a:r>
-              <a:t>3.0</a:t>
+              <a:t>26.8</a:t>
             </a:r>
           </a:p>
         </p:txBody>
@@ -28203,7 +28203,7 @@
               </a:defRPr>
             </a:pPr>
             <a:r>
-              <a:t>5.0</a:t>
+              <a:t>3.9</a:t>
             </a:r>
           </a:p>
         </p:txBody>
@@ -28293,7 +28293,7 @@
               </a:defRPr>
             </a:pPr>
             <a:r>
-              <a:t>-2.0</a:t>
+              <a:t>7.0</a:t>
             </a:r>
           </a:p>
         </p:txBody>
@@ -28473,7 +28473,7 @@
               </a:defRPr>
             </a:pPr>
             <a:r>
-              <a:t>200</a:t>
+              <a:t>600</a:t>
             </a:r>
           </a:p>
         </p:txBody>
@@ -28563,7 +28563,7 @@
               </a:defRPr>
             </a:pPr>
             <a:r>
-              <a:t>15.0</a:t>
+              <a:t>34.1</a:t>
             </a:r>
           </a:p>
         </p:txBody>
@@ -28653,7 +28653,7 @@
               </a:defRPr>
             </a:pPr>
             <a:r>
-              <a:t>18.0</a:t>
+              <a:t>110.9</a:t>
             </a:r>
           </a:p>
         </p:txBody>
@@ -28743,7 +28743,7 @@
               </a:defRPr>
             </a:pPr>
             <a:r>
-              <a:t>6.0</a:t>
+              <a:t>9.5</a:t>
             </a:r>
           </a:p>
         </p:txBody>
@@ -28833,7 +28833,7 @@
               </a:defRPr>
             </a:pPr>
             <a:r>
-              <a:t>9.0</a:t>
+              <a:t>24.6</a:t>
             </a:r>
           </a:p>
         </p:txBody>
@@ -29013,7 +29013,7 @@
               </a:defRPr>
             </a:pPr>
             <a:r>
-              <a:t>500</a:t>
+              <a:t>1,500</a:t>
             </a:r>
           </a:p>
         </p:txBody>
@@ -29103,7 +29103,7 @@
               </a:defRPr>
             </a:pPr>
             <a:r>
-              <a:t>40.0</a:t>
+              <a:t>79.2</a:t>
             </a:r>
           </a:p>
         </p:txBody>
@@ -29193,7 +29193,7 @@
               </a:defRPr>
             </a:pPr>
             <a:r>
-              <a:t>58.0</a:t>
+              <a:t>308.4</a:t>
             </a:r>
           </a:p>
         </p:txBody>
@@ -29283,7 +29283,7 @@
               </a:defRPr>
             </a:pPr>
             <a:r>
-              <a:t>8.0</a:t>
+              <a:t>24.8</a:t>
             </a:r>
           </a:p>
         </p:txBody>
@@ -29373,7 +29373,7 @@
               </a:defRPr>
             </a:pPr>
             <a:r>
-              <a:t>32.0</a:t>
+              <a:t>54.4</a:t>
             </a:r>
           </a:p>
         </p:txBody>
@@ -29553,7 +29553,7 @@
               </a:defRPr>
             </a:pPr>
             <a:r>
-              <a:t>1000</a:t>
+              <a:t>3,000</a:t>
             </a:r>
           </a:p>
         </p:txBody>
@@ -29643,7 +29643,7 @@
               </a:defRPr>
             </a:pPr>
             <a:r>
-              <a:t>85.0</a:t>
+              <a:t>152.2</a:t>
             </a:r>
           </a:p>
         </p:txBody>
@@ -29733,7 +29733,7 @@
               </a:defRPr>
             </a:pPr>
             <a:r>
-              <a:t>143.0</a:t>
+              <a:t>697.1</a:t>
             </a:r>
           </a:p>
         </p:txBody>
@@ -29823,7 +29823,7 @@
               </a:defRPr>
             </a:pPr>
             <a:r>
-              <a:t>12.0</a:t>
+              <a:t>42.5</a:t>
             </a:r>
           </a:p>
         </p:txBody>
@@ -29913,7 +29913,7 @@
               </a:defRPr>
             </a:pPr>
             <a:r>
-              <a:t>73.0</a:t>
+              <a:t>109.7</a:t>
             </a:r>
           </a:p>
         </p:txBody>
@@ -32760,7 +32760,7 @@
               </a:defRPr>
             </a:pPr>
             <a:r>
-              <a:t>35%</a:t>
+              <a:t>40%</a:t>
             </a:r>
           </a:p>
         </p:txBody>
@@ -32805,7 +32805,7 @@
               </a:defRPr>
             </a:pPr>
             <a:r>
-              <a:t>产品研发</a:t>
+              <a:t>技术研发</a:t>
             </a:r>
           </a:p>
         </p:txBody>
@@ -32850,7 +32850,7 @@
               </a:defRPr>
             </a:pPr>
             <a:r>
-              <a:t>7大Agent完善 + 政策复制Agent</a:t>
+              <a:t>7大Agent完善 + AI API + 数据对接</a:t>
             </a:r>
           </a:p>
         </p:txBody>
@@ -32895,7 +32895,7 @@
               </a:defRPr>
             </a:pPr>
             <a:r>
-              <a:t>25%</a:t>
+              <a:t>30%</a:t>
             </a:r>
           </a:p>
         </p:txBody>
@@ -32940,7 +32940,7 @@
               </a:defRPr>
             </a:pPr>
             <a:r>
-              <a:t>市场推广</a:t>
+              <a:t>市场拓展</a:t>
             </a:r>
           </a:p>
         </p:txBody>
@@ -32985,7 +32985,7 @@
               </a:defRPr>
             </a:pPr>
             <a:r>
-              <a:t>义乌商户拓展 + 39城复制</a:t>
+              <a:t>义乌地推驻点 + 39城复制</a:t>
             </a:r>
           </a:p>
         </p:txBody>
@@ -33030,7 +33030,7 @@
               </a:defRPr>
             </a:pPr>
             <a:r>
-              <a:t>25%</a:t>
+              <a:t>20%</a:t>
             </a:r>
           </a:p>
         </p:txBody>
@@ -33120,7 +33120,7 @@
               </a:defRPr>
             </a:pPr>
             <a:r>
-              <a:t>核心岗位招聘 + 城市合伙人</a:t>
+              <a:t>核心工程师招聘 + 运营/政策</a:t>
             </a:r>
           </a:p>
         </p:txBody>
@@ -33165,7 +33165,7 @@
               </a:defRPr>
             </a:pPr>
             <a:r>
-              <a:t>15%</a:t>
+              <a:t>10%</a:t>
             </a:r>
           </a:p>
         </p:txBody>
@@ -33255,7 +33255,7 @@
               </a:defRPr>
             </a:pPr>
             <a:r>
-              <a:t>服务器 + 日常运营</a:t>
+              <a:t>服务器 + 法务 + 应急</a:t>
             </a:r>
           </a:p>
         </p:txBody>
@@ -33523,7 +33523,7 @@
               </a:defRPr>
             </a:pPr>
             <a:r>
-              <a:t>义乌本地种子用户50+</a:t>
+              <a:t>义乌本地种子用户150+</a:t>
             </a:r>
           </a:p>
         </p:txBody>
@@ -33656,7 +33656,7 @@
               </a:defRPr>
             </a:pPr>
             <a:r>
-              <a:t>付费用户200+，月收入15万</a:t>
+              <a:t>付费用户600+，月收入34万</a:t>
             </a:r>
           </a:p>
         </p:txBody>
@@ -33834,7 +33834,7 @@
               </a:defRPr>
             </a:pPr>
             <a:r>
-              <a:t>扩大盈利规模，付费用户500+</a:t>
+              <a:t>付费用户1,500+，月收入79万</a:t>
             </a:r>
           </a:p>
         </p:txBody>
@@ -34012,7 +34012,7 @@
               </a:defRPr>
             </a:pPr>
             <a:r>
-              <a:t>月收入85万，准备Pre-A轮</a:t>
+              <a:t>月收入152万，累计营收697万，准备Pre-A轮</a:t>
             </a:r>
           </a:p>
         </p:txBody>

--- a/docs/路演PPT_V2.pptx
+++ b/docs/路演PPT_V2.pptx
@@ -16107,7 +16107,7 @@
               </a:defRPr>
             </a:pPr>
             <a:r>
-              <a:t>▸  Redis消息队列</a:t>
+              <a:t>▸  SSE实时进度推流</a:t>
             </a:r>
           </a:p>
           <a:p>
@@ -16126,7 +16126,7 @@
               </a:defRPr>
             </a:pPr>
             <a:r>
-              <a:t>▸  PostgreSQL数据持久化</a:t>
+              <a:t>▸  SQLite持久化(WAL+连接池)</a:t>
             </a:r>
           </a:p>
         </p:txBody>
@@ -16301,7 +16301,7 @@
               </a:defRPr>
             </a:pPr>
             <a:r>
-              <a:t>▸  义乌指数API</a:t>
+              <a:t>▸  义乌指数(真实源)</a:t>
             </a:r>
           </a:p>
           <a:p>
@@ -16320,7 +16320,7 @@
               </a:defRPr>
             </a:pPr>
             <a:r>
-              <a:t>▸  商铺实时数据</a:t>
+              <a:t>▸  实时汇率(真实源)</a:t>
             </a:r>
           </a:p>
           <a:p>
@@ -16339,7 +16339,7 @@
               </a:defRPr>
             </a:pPr>
             <a:r>
-              <a:t>▸  海关合规数据库</a:t>
+              <a:t>▸  义新欧线路(ETL管道)</a:t>
             </a:r>
           </a:p>
           <a:p>
@@ -16358,7 +16358,7 @@
               </a:defRPr>
             </a:pPr>
             <a:r>
-              <a:t>▸  39城政策数据库</a:t>
+              <a:t>▸  商铺/39城政策(数据集)</a:t>
             </a:r>
           </a:p>
         </p:txBody>
@@ -16491,7 +16491,7 @@
               </a:defRPr>
             </a:pPr>
             <a:r>
-              <a:t>GPT-4o 多语言理解  |  LangGraph Agent编排  |  RAG知识增强  |  向量检索  |  实时数据流  |  多模态内容生成  |  政策知识图谱</a:t>
+              <a:t>通义千问 qwen-plus 多语言理解  |  LangGraph Agent编排  |  RAG知识增强  |  向量检索  |  实时数据流(SSE)  |  多模态内容生成  |  政策知识图谱</a:t>
             </a:r>
           </a:p>
         </p:txBody>
@@ -27170,7 +27170,7 @@
               </a:defRPr>
             </a:pPr>
             <a:r>
-              <a:t>12个月收入+39城复制，首月即实现正向现金流（已对齐《财务预测与商业计划》权威模型，M12累计营收697.1万）</a:t>
+              <a:t>营收预测697.1万(0→1验证中)·净利率60-72%·LTV/CAC≈24:1·首月即正向现金流</a:t>
             </a:r>
           </a:p>
         </p:txBody>
